--- a/decks/leave-behinds/SLG-07-GovOps-Service-Desk-OnePager.pptx
+++ b/decks/leave-behinds/SLG-07-GovOps-Service-Desk-OnePager.pptx
@@ -894,6 +894,10 @@
           </a:solidFill>
           <a:ln/>
         </p:spPr>
+        <p:txBody>
+          <a:bodyPr/>
+          <a:p/>
+        </p:txBody>
       </p:sp>
       <p:sp>
         <p:nvSpPr>
@@ -916,6 +920,10 @@
           </a:solidFill>
           <a:ln/>
         </p:spPr>
+        <p:txBody>
+          <a:bodyPr/>
+          <a:p/>
+        </p:txBody>
       </p:sp>
       <p:sp>
         <p:nvSpPr>
@@ -1141,6 +1149,10 @@
             <a:prstDash val="solid"/>
           </a:ln>
         </p:spPr>
+        <p:txBody>
+          <a:bodyPr/>
+          <a:p/>
+        </p:txBody>
       </p:sp>
       <p:sp>
         <p:nvSpPr>
@@ -1443,6 +1455,10 @@
             <a:prstDash val="solid"/>
           </a:ln>
         </p:spPr>
+        <p:txBody>
+          <a:bodyPr/>
+          <a:p/>
+        </p:txBody>
       </p:sp>
       <p:sp>
         <p:nvSpPr>
@@ -1502,6 +1518,10 @@
           </a:solidFill>
           <a:ln/>
         </p:spPr>
+        <p:txBody>
+          <a:bodyPr/>
+          <a:p/>
+        </p:txBody>
       </p:sp>
       <p:sp>
         <p:nvSpPr>
@@ -1603,6 +1623,10 @@
           </a:solidFill>
           <a:ln/>
         </p:spPr>
+        <p:txBody>
+          <a:bodyPr/>
+          <a:p/>
+        </p:txBody>
       </p:sp>
       <p:sp>
         <p:nvSpPr>
@@ -1704,6 +1728,10 @@
           </a:solidFill>
           <a:ln/>
         </p:spPr>
+        <p:txBody>
+          <a:bodyPr/>
+          <a:p/>
+        </p:txBody>
       </p:sp>
       <p:sp>
         <p:nvSpPr>
@@ -1805,6 +1833,10 @@
           </a:solidFill>
           <a:ln/>
         </p:spPr>
+        <p:txBody>
+          <a:bodyPr/>
+          <a:p/>
+        </p:txBody>
       </p:sp>
       <p:sp>
         <p:nvSpPr>
@@ -1917,6 +1949,10 @@
           </a:solidFill>
           <a:ln/>
         </p:spPr>
+        <p:txBody>
+          <a:bodyPr/>
+          <a:p/>
+        </p:txBody>
       </p:sp>
       <p:sp>
         <p:nvSpPr>
@@ -2067,6 +2103,10 @@
             <a:prstDash val="solid"/>
           </a:ln>
         </p:spPr>
+        <p:txBody>
+          <a:bodyPr/>
+          <a:p/>
+        </p:txBody>
       </p:sp>
       <p:sp>
         <p:nvSpPr>
@@ -2369,6 +2409,10 @@
             <a:prstDash val="solid"/>
           </a:ln>
         </p:spPr>
+        <p:txBody>
+          <a:bodyPr/>
+          <a:p/>
+        </p:txBody>
       </p:sp>
       <p:sp>
         <p:nvSpPr>
@@ -2666,6 +2710,10 @@
           </a:solidFill>
           <a:ln/>
         </p:spPr>
+        <p:txBody>
+          <a:bodyPr/>
+          <a:p/>
+        </p:txBody>
       </p:sp>
       <p:sp>
         <p:nvSpPr>
@@ -2801,6 +2849,40 @@
               <a:t>Figures are documented outcomes from named deployments, labeled by evidence tier; full citations in decks/DECK-SOURCES.md. Applied to a reference agency — not a guarantee.</a:t>
             </a:r>
             <a:endParaRPr lang="en-US" sz="700" dirty="0"/>
+          </a:p>
+        </p:txBody>
+      </p:sp>
+      <p:sp>
+        <p:nvSpPr>
+          <p:cNvPr id="48" name="TextBox 47"/>
+          <p:cNvSpPr txBox="1"/>
+          <p:nvPr/>
+        </p:nvSpPr>
+        <p:spPr>
+          <a:xfrm>
+            <a:off x="274320" y="9555480"/>
+            <a:ext cx="7223760" cy="411480"/>
+          </a:xfrm>
+          <a:prstGeom prst="rect">
+            <a:avLst/>
+          </a:prstGeom>
+          <a:noFill/>
+        </p:spPr>
+        <p:txBody>
+          <a:bodyPr wrap="square" tIns="0" bIns="0">
+            <a:spAutoFit/>
+          </a:bodyPr>
+          <a:lstStyle/>
+          <a:p>
+            <a:pPr algn="l"/>
+            <a:r>
+              <a:rPr sz="700" i="1">
+                <a:solidFill>
+                  <a:srgbClr val="879296"/>
+                </a:solidFill>
+              </a:rPr>
+              <a:t>Reference accelerator — not an AWS service, not AWS-supported software, not a compliance certification, and not production-ready for regulated data without customer-specific engineering, testing, authorization, and operational ownership. Built on AWS; not affiliated with or endorsed by Amazon Web Services.</a:t>
+            </a:r>
           </a:p>
         </p:txBody>
       </p:sp>
